--- a/PPTs/Bgolearn_宣传版.pptx
+++ b/PPTs/Bgolearn_宣传版.pptx
@@ -1740,7 +1740,7 @@
           <a:p>
             <a:fld id="{5BCAD085-E8A6-8845-BD4E-CB4CCA059FC4}" type="datetimeFigureOut">
               <a:rPr lang="en-US" smtClean="0"/>
-              <a:t>8/7/26</a:t>
+              <a:t>8/10/26</a:t>
             </a:fld>
             <a:endParaRPr lang="en-US"/>
           </a:p>
@@ -1908,7 +1908,7 @@
           <a:p>
             <a:fld id="{5BCAD085-E8A6-8845-BD4E-CB4CCA059FC4}" type="datetimeFigureOut">
               <a:rPr lang="en-US" smtClean="0"/>
-              <a:t>8/7/26</a:t>
+              <a:t>8/10/26</a:t>
             </a:fld>
             <a:endParaRPr lang="en-US"/>
           </a:p>
@@ -2086,7 +2086,7 @@
           <a:p>
             <a:fld id="{5BCAD085-E8A6-8845-BD4E-CB4CCA059FC4}" type="datetimeFigureOut">
               <a:rPr lang="en-US" smtClean="0"/>
-              <a:t>8/7/26</a:t>
+              <a:t>8/10/26</a:t>
             </a:fld>
             <a:endParaRPr lang="en-US"/>
           </a:p>
@@ -2254,7 +2254,7 @@
           <a:p>
             <a:fld id="{5BCAD085-E8A6-8845-BD4E-CB4CCA059FC4}" type="datetimeFigureOut">
               <a:rPr lang="en-US" smtClean="0"/>
-              <a:t>8/7/26</a:t>
+              <a:t>8/10/26</a:t>
             </a:fld>
             <a:endParaRPr lang="en-US"/>
           </a:p>
@@ -2499,7 +2499,7 @@
           <a:p>
             <a:fld id="{5BCAD085-E8A6-8845-BD4E-CB4CCA059FC4}" type="datetimeFigureOut">
               <a:rPr lang="en-US" smtClean="0"/>
-              <a:t>8/7/26</a:t>
+              <a:t>8/10/26</a:t>
             </a:fld>
             <a:endParaRPr lang="en-US"/>
           </a:p>
@@ -2784,7 +2784,7 @@
           <a:p>
             <a:fld id="{5BCAD085-E8A6-8845-BD4E-CB4CCA059FC4}" type="datetimeFigureOut">
               <a:rPr lang="en-US" smtClean="0"/>
-              <a:t>8/7/26</a:t>
+              <a:t>8/10/26</a:t>
             </a:fld>
             <a:endParaRPr lang="en-US"/>
           </a:p>
@@ -3203,7 +3203,7 @@
           <a:p>
             <a:fld id="{5BCAD085-E8A6-8845-BD4E-CB4CCA059FC4}" type="datetimeFigureOut">
               <a:rPr lang="en-US" smtClean="0"/>
-              <a:t>8/7/26</a:t>
+              <a:t>8/10/26</a:t>
             </a:fld>
             <a:endParaRPr lang="en-US"/>
           </a:p>
@@ -3320,7 +3320,7 @@
           <a:p>
             <a:fld id="{5BCAD085-E8A6-8845-BD4E-CB4CCA059FC4}" type="datetimeFigureOut">
               <a:rPr lang="en-US" smtClean="0"/>
-              <a:t>8/7/26</a:t>
+              <a:t>8/10/26</a:t>
             </a:fld>
             <a:endParaRPr lang="en-US"/>
           </a:p>
@@ -3415,7 +3415,7 @@
           <a:p>
             <a:fld id="{5BCAD085-E8A6-8845-BD4E-CB4CCA059FC4}" type="datetimeFigureOut">
               <a:rPr lang="en-US" smtClean="0"/>
-              <a:t>8/7/26</a:t>
+              <a:t>8/10/26</a:t>
             </a:fld>
             <a:endParaRPr lang="en-US"/>
           </a:p>
@@ -3690,7 +3690,7 @@
           <a:p>
             <a:fld id="{5BCAD085-E8A6-8845-BD4E-CB4CCA059FC4}" type="datetimeFigureOut">
               <a:rPr lang="en-US" smtClean="0"/>
-              <a:t>8/7/26</a:t>
+              <a:t>8/10/26</a:t>
             </a:fld>
             <a:endParaRPr lang="en-US"/>
           </a:p>
@@ -3942,7 +3942,7 @@
           <a:p>
             <a:fld id="{5BCAD085-E8A6-8845-BD4E-CB4CCA059FC4}" type="datetimeFigureOut">
               <a:rPr lang="en-US" smtClean="0"/>
-              <a:t>8/7/26</a:t>
+              <a:t>8/10/26</a:t>
             </a:fld>
             <a:endParaRPr lang="en-US"/>
           </a:p>
@@ -4153,7 +4153,7 @@
           <a:p>
             <a:fld id="{5BCAD085-E8A6-8845-BD4E-CB4CCA059FC4}" type="datetimeFigureOut">
               <a:rPr lang="en-US" smtClean="0"/>
-              <a:t>8/7/26</a:t>
+              <a:t>8/10/26</a:t>
             </a:fld>
             <a:endParaRPr lang="en-US"/>
           </a:p>
@@ -5054,14 +5054,29 @@
               </a:lnSpc>
             </a:pPr>
             <a:r>
-              <a:rPr sz="1100" b="0">
+              <a:rPr sz="1100" b="0" dirty="0">
                 <a:solidFill>
                   <a:srgbClr val="C9ED88"/>
                 </a:solidFill>
                 <a:latin typeface="Hiragino Sans GB"/>
               </a:rPr>
-              <a:t>2026 正式论文</a:t>
-            </a:r>
+              <a:t>2026 </a:t>
+            </a:r>
+            <a:r>
+              <a:rPr sz="1100" b="0" dirty="0" err="1">
+                <a:solidFill>
+                  <a:srgbClr val="C9ED88"/>
+                </a:solidFill>
+                <a:latin typeface="Hiragino Sans GB"/>
+              </a:rPr>
+              <a:t>正式论文</a:t>
+            </a:r>
+            <a:endParaRPr sz="1100" b="0" dirty="0">
+              <a:solidFill>
+                <a:srgbClr val="C9ED88"/>
+              </a:solidFill>
+              <a:latin typeface="Hiragino Sans GB"/>
+            </a:endParaRPr>
           </a:p>
         </p:txBody>
       </p:sp>
@@ -5159,7 +5174,7 @@
         <p:spPr>
           <a:xfrm>
             <a:off x="3465576" y="5193792"/>
-            <a:ext cx="2542032" cy="274320"/>
+            <a:ext cx="2542032" cy="241733"/>
           </a:xfrm>
           <a:prstGeom prst="rect">
             <a:avLst/>
@@ -5178,13 +5193,22 @@
               </a:lnSpc>
             </a:pPr>
             <a:r>
+              <a:rPr lang="en-CN" sz="1100" dirty="0">
+                <a:solidFill>
+                  <a:srgbClr val="C9ED88"/>
+                </a:solidFill>
+                <a:latin typeface="Hiragino Sans GB"/>
+              </a:rPr>
+              <a:t>书籍</a:t>
+            </a:r>
+            <a:r>
               <a:rPr sz="1100" b="0" dirty="0" err="1">
                 <a:solidFill>
                   <a:srgbClr val="C9ED88"/>
                 </a:solidFill>
                 <a:latin typeface="Hiragino Sans GB"/>
               </a:rPr>
-              <a:t>院士采用</a:t>
+              <a:t>采用</a:t>
             </a:r>
             <a:endParaRPr sz="1100" b="0" dirty="0">
               <a:solidFill>
@@ -17319,7 +17343,7 @@
         <p:spPr>
           <a:xfrm>
             <a:off x="3291840" y="2944368"/>
-            <a:ext cx="7863840" cy="365760"/>
+            <a:ext cx="7863840" cy="295145"/>
           </a:xfrm>
           <a:prstGeom prst="rect">
             <a:avLst/>
@@ -17338,14 +17362,83 @@
               </a:lnSpc>
             </a:pPr>
             <a:r>
-              <a:rPr sz="1450" b="0">
+              <a:rPr sz="1450" b="0" dirty="0" err="1">
                 <a:solidFill>
                   <a:srgbClr val="CBD7D3"/>
                 </a:solidFill>
                 <a:latin typeface="Hiragino Sans GB"/>
               </a:rPr>
-              <a:t>期刊论文 + 院士教材 + 政府支持 + 多领域案例</a:t>
-            </a:r>
+              <a:t>期刊论文</a:t>
+            </a:r>
+            <a:r>
+              <a:rPr sz="1450" b="0" dirty="0">
+                <a:solidFill>
+                  <a:srgbClr val="CBD7D3"/>
+                </a:solidFill>
+                <a:latin typeface="Hiragino Sans GB"/>
+              </a:rPr>
+              <a:t> + </a:t>
+            </a:r>
+            <a:r>
+              <a:rPr sz="1450" b="0" dirty="0" err="1">
+                <a:solidFill>
+                  <a:srgbClr val="CBD7D3"/>
+                </a:solidFill>
+                <a:latin typeface="Hiragino Sans GB"/>
+              </a:rPr>
+              <a:t>教材</a:t>
+            </a:r>
+            <a:r>
+              <a:rPr lang="en-CN" sz="1450" b="0" dirty="0">
+                <a:solidFill>
+                  <a:srgbClr val="CBD7D3"/>
+                </a:solidFill>
+                <a:latin typeface="Hiragino Sans GB"/>
+              </a:rPr>
+              <a:t>采用</a:t>
+            </a:r>
+            <a:r>
+              <a:rPr sz="1450" b="0" dirty="0">
+                <a:solidFill>
+                  <a:srgbClr val="CBD7D3"/>
+                </a:solidFill>
+                <a:latin typeface="Hiragino Sans GB"/>
+              </a:rPr>
+              <a:t> + </a:t>
+            </a:r>
+            <a:r>
+              <a:rPr sz="1450" b="0" dirty="0" err="1">
+                <a:solidFill>
+                  <a:srgbClr val="CBD7D3"/>
+                </a:solidFill>
+                <a:latin typeface="Hiragino Sans GB"/>
+              </a:rPr>
+              <a:t>政府支持</a:t>
+            </a:r>
+            <a:r>
+              <a:rPr sz="1450" b="0" dirty="0">
+                <a:solidFill>
+                  <a:srgbClr val="CBD7D3"/>
+                </a:solidFill>
+                <a:latin typeface="Hiragino Sans GB"/>
+              </a:rPr>
+              <a:t> + </a:t>
+            </a:r>
+            <a:r>
+              <a:rPr sz="1450" b="0" dirty="0" err="1">
+                <a:solidFill>
+                  <a:srgbClr val="CBD7D3"/>
+                </a:solidFill>
+                <a:latin typeface="Hiragino Sans GB"/>
+              </a:rPr>
+              <a:t>多领域案例</a:t>
+            </a:r>
+            <a:endParaRPr sz="1450" b="0" dirty="0">
+              <a:solidFill>
+                <a:srgbClr val="CBD7D3"/>
+              </a:solidFill>
+              <a:latin typeface="Hiragino Sans GB"/>
+            </a:endParaRPr>
           </a:p>
         </p:txBody>
       </p:sp>
@@ -17694,7 +17787,7 @@
         <p:spPr>
           <a:xfrm>
             <a:off x="777240" y="5669280"/>
-            <a:ext cx="10607040" cy="457200"/>
+            <a:ext cx="10607040" cy="329642"/>
           </a:xfrm>
           <a:prstGeom prst="rect">
             <a:avLst/>
@@ -17713,13 +17806,49 @@
               </a:lnSpc>
             </a:pPr>
             <a:r>
+              <a:rPr sz="1700" b="1" dirty="0" err="1">
+                <a:solidFill>
+                  <a:srgbClr val="C9ED88"/>
+                </a:solidFill>
+                <a:latin typeface="Hiragino Sans GB"/>
+              </a:rPr>
+              <a:t>下一步：用您的历史实验数据</a:t>
+            </a:r>
+            <a:r>
+              <a:rPr sz="1700" b="1" err="1">
+                <a:solidFill>
+                  <a:srgbClr val="C9ED88"/>
+                </a:solidFill>
+                <a:latin typeface="Hiragino Sans GB"/>
+              </a:rPr>
+              <a:t>，</a:t>
+            </a:r>
+            <a:r>
               <a:rPr sz="1700" b="1">
                 <a:solidFill>
                   <a:srgbClr val="C9ED88"/>
                 </a:solidFill>
                 <a:latin typeface="Hiragino Sans GB"/>
               </a:rPr>
-              <a:t>下一步：用您的历史实验数据，我们在一周内回一份「可优化的目标清单」。</a:t>
+              <a:t>我们回一份</a:t>
+            </a:r>
+            <a:r>
+              <a:rPr sz="1700" b="1" dirty="0" err="1">
+                <a:solidFill>
+                  <a:srgbClr val="C9ED88"/>
+                </a:solidFill>
+                <a:latin typeface="Hiragino Sans GB"/>
+              </a:rPr>
+              <a:t>「可优化的目标清单</a:t>
+            </a:r>
+            <a:r>
+              <a:rPr sz="1700" b="1" dirty="0">
+                <a:solidFill>
+                  <a:srgbClr val="C9ED88"/>
+                </a:solidFill>
+                <a:latin typeface="Hiragino Sans GB"/>
+              </a:rPr>
+              <a:t>」。</a:t>
             </a:r>
           </a:p>
         </p:txBody>
